--- a/report/Infineon_PSOC6_Lecture_Project_Status_Template.pptx
+++ b/report/Infineon_PSOC6_Lecture_Project_Status_Template.pptx
@@ -20947,7 +20947,74 @@
                   <a:schemeClr val="tx1"/>
                 </a:solidFill>
               </a:rPr>
-              <a:t>text</a:t>
+              <a:t>Collected a lot of data for both audio and IMU based models</a:t>
+            </a:r>
+          </a:p>
+          <a:p>
+            <a:pPr marL="285750" indent="-285750" defTabSz="576000" eaLnBrk="0" hangingPunct="0">
+              <a:lnSpc>
+                <a:spcPct val="120000"/>
+              </a:lnSpc>
+              <a:buFont typeface="Arial" panose="020B0604020202020204" pitchFamily="34" charset="0"/>
+              <a:buChar char="•"/>
+            </a:pPr>
+            <a:r>
+              <a:rPr lang="en-US" dirty="0">
+                <a:solidFill>
+                  <a:schemeClr val="tx1"/>
+                </a:solidFill>
+              </a:rPr>
+              <a:t>Started developing and optimizing both microphone and IMU models</a:t>
+            </a:r>
+          </a:p>
+          <a:p>
+            <a:pPr marL="285750" indent="-285750" defTabSz="576000" eaLnBrk="0" hangingPunct="0">
+              <a:lnSpc>
+                <a:spcPct val="120000"/>
+              </a:lnSpc>
+              <a:buFont typeface="Arial" panose="020B0604020202020204" pitchFamily="34" charset="0"/>
+              <a:buChar char="•"/>
+            </a:pPr>
+            <a:r>
+              <a:rPr lang="en-US" dirty="0">
+                <a:solidFill>
+                  <a:schemeClr val="tx1"/>
+                </a:solidFill>
+              </a:rPr>
+              <a:t>Tweaked the </a:t>
+            </a:r>
+            <a:r>
+              <a:rPr lang="en-US" dirty="0" err="1">
+                <a:solidFill>
+                  <a:schemeClr val="tx1"/>
+                </a:solidFill>
+              </a:rPr>
+              <a:t>Micropython</a:t>
+            </a:r>
+            <a:r>
+              <a:rPr lang="en-US" dirty="0">
+                <a:solidFill>
+                  <a:schemeClr val="tx1"/>
+                </a:solidFill>
+              </a:rPr>
+              <a:t> code to fit our current testbench setup</a:t>
+            </a:r>
+          </a:p>
+          <a:p>
+            <a:pPr marL="285750" indent="-285750" defTabSz="576000" eaLnBrk="0" hangingPunct="0">
+              <a:lnSpc>
+                <a:spcPct val="120000"/>
+              </a:lnSpc>
+              <a:buFont typeface="Arial" panose="020B0604020202020204" pitchFamily="34" charset="0"/>
+              <a:buChar char="•"/>
+            </a:pPr>
+            <a:r>
+              <a:rPr lang="en-US" dirty="0">
+                <a:solidFill>
+                  <a:schemeClr val="tx1"/>
+                </a:solidFill>
+              </a:rPr>
+              <a:t>Created script for improved impact data collection (IMU for now)</a:t>
             </a:r>
           </a:p>
         </p:txBody>
@@ -21030,8 +21097,73 @@
                   <a:schemeClr val="tx1"/>
                 </a:solidFill>
               </a:rPr>
-              <a:t>text</a:t>
-            </a:r>
+              <a:t>Optimize further for model accuracy</a:t>
+            </a:r>
+          </a:p>
+          <a:p>
+            <a:pPr marL="285750" indent="-285750" defTabSz="576000" eaLnBrk="0" hangingPunct="0">
+              <a:lnSpc>
+                <a:spcPct val="120000"/>
+              </a:lnSpc>
+              <a:buFont typeface="Arial" panose="020B0604020202020204" pitchFamily="34" charset="0"/>
+              <a:buChar char="•"/>
+            </a:pPr>
+            <a:r>
+              <a:rPr lang="en-US" dirty="0">
+                <a:solidFill>
+                  <a:schemeClr val="tx1"/>
+                </a:solidFill>
+              </a:rPr>
+              <a:t>Create a script for optimized impact training for the microphone</a:t>
+            </a:r>
+          </a:p>
+          <a:p>
+            <a:pPr marL="285750" indent="-285750" defTabSz="576000" eaLnBrk="0" hangingPunct="0">
+              <a:lnSpc>
+                <a:spcPct val="120000"/>
+              </a:lnSpc>
+              <a:buFont typeface="Arial" panose="020B0604020202020204" pitchFamily="34" charset="0"/>
+              <a:buChar char="•"/>
+            </a:pPr>
+            <a:r>
+              <a:rPr lang="en-US" dirty="0">
+                <a:solidFill>
+                  <a:schemeClr val="tx1"/>
+                </a:solidFill>
+              </a:rPr>
+              <a:t>Convert and upload the models to the board</a:t>
+            </a:r>
+          </a:p>
+          <a:p>
+            <a:pPr marL="285750" indent="-285750" defTabSz="576000" eaLnBrk="0" hangingPunct="0">
+              <a:lnSpc>
+                <a:spcPct val="120000"/>
+              </a:lnSpc>
+              <a:buFont typeface="Arial" panose="020B0604020202020204" pitchFamily="34" charset="0"/>
+              <a:buChar char="•"/>
+            </a:pPr>
+            <a:r>
+              <a:rPr lang="en-US" dirty="0">
+                <a:solidFill>
+                  <a:schemeClr val="tx1"/>
+                </a:solidFill>
+              </a:rPr>
+              <a:t>Combine the microphone and IMU data into a singular model</a:t>
+            </a:r>
+          </a:p>
+          <a:p>
+            <a:pPr marL="285750" indent="-285750" defTabSz="576000" eaLnBrk="0" hangingPunct="0">
+              <a:lnSpc>
+                <a:spcPct val="120000"/>
+              </a:lnSpc>
+              <a:buFont typeface="Arial" panose="020B0604020202020204" pitchFamily="34" charset="0"/>
+              <a:buChar char="•"/>
+            </a:pPr>
+            <a:endParaRPr lang="en-US" dirty="0">
+              <a:solidFill>
+                <a:schemeClr val="tx1"/>
+              </a:solidFill>
+            </a:endParaRPr>
           </a:p>
         </p:txBody>
       </p:sp>
@@ -21113,8 +21245,223 @@
                   <a:schemeClr val="tx1"/>
                 </a:solidFill>
               </a:rPr>
-              <a:t>text</a:t>
-            </a:r>
+              <a:t>Why is label overlapping not allowed?</a:t>
+            </a:r>
+          </a:p>
+          <a:p>
+            <a:pPr marL="285750" indent="-285750" defTabSz="576000" eaLnBrk="0" hangingPunct="0">
+              <a:lnSpc>
+                <a:spcPct val="120000"/>
+              </a:lnSpc>
+              <a:buFont typeface="Arial" panose="020B0604020202020204" pitchFamily="34" charset="0"/>
+              <a:buChar char="•"/>
+            </a:pPr>
+            <a:r>
+              <a:rPr lang="en-US" dirty="0">
+                <a:solidFill>
+                  <a:schemeClr val="tx1"/>
+                </a:solidFill>
+              </a:rPr>
+              <a:t>IMU and Mic data not in sync when recording both simultaneously</a:t>
+            </a:r>
+          </a:p>
+          <a:p>
+            <a:pPr marL="285750" indent="-285750" defTabSz="576000" eaLnBrk="0" hangingPunct="0">
+              <a:lnSpc>
+                <a:spcPct val="120000"/>
+              </a:lnSpc>
+              <a:buFont typeface="Arial" panose="020B0604020202020204" pitchFamily="34" charset="0"/>
+              <a:buChar char="•"/>
+            </a:pPr>
+            <a:r>
+              <a:rPr lang="en-US" dirty="0">
+                <a:solidFill>
+                  <a:schemeClr val="tx1"/>
+                </a:solidFill>
+              </a:rPr>
+              <a:t>Model fails to train</a:t>
+            </a:r>
+          </a:p>
+          <a:p>
+            <a:pPr marL="285750" indent="-285750" defTabSz="576000" eaLnBrk="0" hangingPunct="0">
+              <a:lnSpc>
+                <a:spcPct val="120000"/>
+              </a:lnSpc>
+              <a:buFont typeface="Arial" panose="020B0604020202020204" pitchFamily="34" charset="0"/>
+              <a:buChar char="•"/>
+            </a:pPr>
+            <a:r>
+              <a:rPr lang="en-US" dirty="0">
+                <a:solidFill>
+                  <a:schemeClr val="tx1"/>
+                </a:solidFill>
+              </a:rPr>
+              <a:t>Filtering training data before model training – necessary or not?</a:t>
+            </a:r>
+          </a:p>
+          <a:p>
+            <a:pPr defTabSz="576000" eaLnBrk="0" hangingPunct="0">
+              <a:lnSpc>
+                <a:spcPct val="120000"/>
+              </a:lnSpc>
+            </a:pPr>
+            <a:endParaRPr lang="en-US" dirty="0">
+              <a:solidFill>
+                <a:schemeClr val="tx1"/>
+              </a:solidFill>
+            </a:endParaRPr>
+          </a:p>
+          <a:p>
+            <a:pPr defTabSz="576000" eaLnBrk="0" hangingPunct="0">
+              <a:lnSpc>
+                <a:spcPct val="120000"/>
+              </a:lnSpc>
+            </a:pPr>
+            <a:r>
+              <a:rPr lang="en-US" sz="1200" dirty="0">
+                <a:solidFill>
+                  <a:schemeClr val="tx1"/>
+                </a:solidFill>
+              </a:rPr>
+              <a:t>Proposed features for </a:t>
+            </a:r>
+            <a:r>
+              <a:rPr lang="en-US" sz="1200" dirty="0" err="1">
+                <a:solidFill>
+                  <a:schemeClr val="tx1"/>
+                </a:solidFill>
+              </a:rPr>
+              <a:t>Deepcraft</a:t>
+            </a:r>
+            <a:r>
+              <a:rPr lang="en-US" sz="1200" dirty="0">
+                <a:solidFill>
+                  <a:schemeClr val="tx1"/>
+                </a:solidFill>
+              </a:rPr>
+              <a:t> studio:</a:t>
+            </a:r>
+          </a:p>
+          <a:p>
+            <a:pPr marL="285750" indent="-285750" defTabSz="576000" eaLnBrk="0" hangingPunct="0">
+              <a:lnSpc>
+                <a:spcPct val="120000"/>
+              </a:lnSpc>
+              <a:buFont typeface="Arial" panose="020B0604020202020204" pitchFamily="34" charset="0"/>
+              <a:buChar char="•"/>
+            </a:pPr>
+            <a:r>
+              <a:rPr lang="en-US" sz="1200" dirty="0">
+                <a:solidFill>
+                  <a:schemeClr val="tx1"/>
+                </a:solidFill>
+              </a:rPr>
+              <a:t>Add a confirmation window before recording over unsaved data</a:t>
+            </a:r>
+          </a:p>
+          <a:p>
+            <a:pPr marL="285750" indent="-285750" defTabSz="576000" eaLnBrk="0" hangingPunct="0">
+              <a:lnSpc>
+                <a:spcPct val="120000"/>
+              </a:lnSpc>
+              <a:buFont typeface="Arial" panose="020B0604020202020204" pitchFamily="34" charset="0"/>
+              <a:buChar char="•"/>
+            </a:pPr>
+            <a:r>
+              <a:rPr lang="en-US" sz="1200" dirty="0">
+                <a:solidFill>
+                  <a:schemeClr val="tx1"/>
+                </a:solidFill>
+              </a:rPr>
+              <a:t>“magnetic” snapping of labels next to each other to prevent overlap </a:t>
+            </a:r>
+          </a:p>
+          <a:p>
+            <a:pPr marL="285750" indent="-285750" defTabSz="576000" eaLnBrk="0" hangingPunct="0">
+              <a:lnSpc>
+                <a:spcPct val="120000"/>
+              </a:lnSpc>
+              <a:buFont typeface="Arial" panose="020B0604020202020204" pitchFamily="34" charset="0"/>
+              <a:buChar char="•"/>
+            </a:pPr>
+            <a:r>
+              <a:rPr lang="en-US" sz="1200" dirty="0"/>
+              <a:t>Feature to fill label gaps with other labels</a:t>
+            </a:r>
+          </a:p>
+          <a:p>
+            <a:pPr marL="285750" indent="-285750" defTabSz="576000" eaLnBrk="0" hangingPunct="0">
+              <a:lnSpc>
+                <a:spcPct val="120000"/>
+              </a:lnSpc>
+              <a:buFont typeface="Arial" panose="020B0604020202020204" pitchFamily="34" charset="0"/>
+              <a:buChar char="•"/>
+            </a:pPr>
+            <a:r>
+              <a:rPr lang="en-US" sz="1200" dirty="0"/>
+              <a:t>Add the predefined label tabs back to an already saved file </a:t>
+            </a:r>
+          </a:p>
+          <a:p>
+            <a:pPr marL="285750" indent="-285750" defTabSz="576000" eaLnBrk="0" hangingPunct="0">
+              <a:lnSpc>
+                <a:spcPct val="120000"/>
+              </a:lnSpc>
+              <a:buFont typeface="Arial" panose="020B0604020202020204" pitchFamily="34" charset="0"/>
+              <a:buChar char="•"/>
+            </a:pPr>
+            <a:r>
+              <a:rPr lang="en-US" sz="1200" dirty="0"/>
+              <a:t>Trimming of recorded data built in</a:t>
+            </a:r>
+          </a:p>
+          <a:p>
+            <a:pPr marL="285750" indent="-285750" defTabSz="576000" eaLnBrk="0" hangingPunct="0">
+              <a:lnSpc>
+                <a:spcPct val="120000"/>
+              </a:lnSpc>
+              <a:buFont typeface="Arial" panose="020B0604020202020204" pitchFamily="34" charset="0"/>
+              <a:buChar char="•"/>
+            </a:pPr>
+            <a:r>
+              <a:rPr lang="en-US" sz="1200" dirty="0">
+                <a:solidFill>
+                  <a:schemeClr val="tx1"/>
+                </a:solidFill>
+              </a:rPr>
+              <a:t>Continue an already existing recording</a:t>
+            </a:r>
+          </a:p>
+          <a:p>
+            <a:pPr marL="285750" indent="-285750" defTabSz="576000" eaLnBrk="0" hangingPunct="0">
+              <a:lnSpc>
+                <a:spcPct val="120000"/>
+              </a:lnSpc>
+              <a:buFont typeface="Arial" panose="020B0604020202020204" pitchFamily="34" charset="0"/>
+              <a:buChar char="•"/>
+            </a:pPr>
+            <a:r>
+              <a:rPr lang="en-US" sz="1200" dirty="0">
+                <a:solidFill>
+                  <a:schemeClr val="tx1"/>
+                </a:solidFill>
+              </a:rPr>
+              <a:t>Verbose errors saying at what time the labels are overlapping/outside data</a:t>
+            </a:r>
+          </a:p>
+          <a:p>
+            <a:pPr marL="285750" indent="-285750" defTabSz="576000" eaLnBrk="0" hangingPunct="0">
+              <a:lnSpc>
+                <a:spcPct val="120000"/>
+              </a:lnSpc>
+              <a:buFont typeface="Arial" panose="020B0604020202020204" pitchFamily="34" charset="0"/>
+              <a:buChar char="•"/>
+            </a:pPr>
+            <a:endParaRPr lang="en-US" dirty="0">
+              <a:solidFill>
+                <a:schemeClr val="tx1"/>
+              </a:solidFill>
+            </a:endParaRPr>
           </a:p>
         </p:txBody>
       </p:sp>
@@ -21257,6 +21604,95 @@
               <a:latin typeface="+mn-lt"/>
               <a:ea typeface="+mn-ea"/>
               <a:cs typeface="+mn-cs"/>
+            </a:endParaRPr>
+          </a:p>
+        </p:txBody>
+      </p:sp>
+      <p:sp>
+        <p:nvSpPr>
+          <p:cNvPr id="4" name="Rectangle: Rounded Corners 3">
+            <a:extLst>
+              <a:ext uri="{FF2B5EF4-FFF2-40B4-BE49-F238E27FC236}">
+                <a16:creationId xmlns:a16="http://schemas.microsoft.com/office/drawing/2014/main" id="{D8F01971-E397-9DE1-BAA5-FABAC9BDC233}"/>
+              </a:ext>
+            </a:extLst>
+          </p:cNvPr>
+          <p:cNvSpPr/>
+          <p:nvPr/>
+        </p:nvSpPr>
+        <p:spPr bwMode="auto">
+          <a:xfrm>
+            <a:off x="328843" y="510723"/>
+            <a:ext cx="6468485" cy="494037"/>
+          </a:xfrm>
+          <a:prstGeom prst="roundRect">
+            <a:avLst>
+              <a:gd name="adj" fmla="val 9662"/>
+            </a:avLst>
+          </a:prstGeom>
+          <a:solidFill>
+            <a:schemeClr val="tx2"/>
+          </a:solidFill>
+          <a:ln w="9525">
+            <a:noFill/>
+            <a:miter lim="800000"/>
+            <a:headEnd/>
+            <a:tailEnd/>
+          </a:ln>
+        </p:spPr>
+        <p:txBody>
+          <a:bodyPr rot="0" spcFirstLastPara="0" vertOverflow="overflow" horzOverflow="overflow" vert="horz" wrap="square" lIns="72000" tIns="72000" rIns="72000" bIns="72000" numCol="1" spcCol="0" rtlCol="0" fromWordArt="0" anchor="ctr" anchorCtr="0" forceAA="0" compatLnSpc="1">
+            <a:prstTxWarp prst="textNoShape">
+              <a:avLst/>
+            </a:prstTxWarp>
+            <a:noAutofit/>
+          </a:bodyPr>
+          <a:lstStyle/>
+          <a:p>
+            <a:pPr defTabSz="576000" eaLnBrk="0" hangingPunct="0">
+              <a:lnSpc>
+                <a:spcPct val="120000"/>
+              </a:lnSpc>
+            </a:pPr>
+            <a:r>
+              <a:rPr lang="en-US" sz="1800" b="1" dirty="0">
+                <a:solidFill>
+                  <a:schemeClr val="bg1"/>
+                </a:solidFill>
+                <a:latin typeface="+mn-lt"/>
+              </a:rPr>
+              <a:t>Team: </a:t>
+            </a:r>
+            <a:r>
+              <a:rPr lang="en-US" sz="1800" b="1" i="1" dirty="0">
+                <a:solidFill>
+                  <a:schemeClr val="bg1"/>
+                </a:solidFill>
+                <a:latin typeface="+mn-lt"/>
+              </a:rPr>
+              <a:t>Motor Group</a:t>
+            </a:r>
+          </a:p>
+          <a:p>
+            <a:pPr algn="r" defTabSz="576000" eaLnBrk="0" hangingPunct="0">
+              <a:lnSpc>
+                <a:spcPct val="120000"/>
+              </a:lnSpc>
+            </a:pPr>
+            <a:r>
+              <a:rPr lang="en-US" sz="1200" i="1" dirty="0">
+                <a:solidFill>
+                  <a:schemeClr val="bg1"/>
+                </a:solidFill>
+                <a:latin typeface="+mn-lt"/>
+              </a:rPr>
+              <a:t>Team Members: Artem Vinivitin, Mihai Marinescu, Simon Kozka</a:t>
+            </a:r>
+            <a:endParaRPr lang="en-US" sz="1600" i="1" dirty="0">
+              <a:solidFill>
+                <a:schemeClr val="bg1"/>
+              </a:solidFill>
+              <a:latin typeface="+mn-lt"/>
             </a:endParaRPr>
           </a:p>
         </p:txBody>
@@ -24093,12 +24529,12 @@
 </file>
 
 <file path=customXml/item1.xml><?xml version="1.0" encoding="utf-8"?>
-<p:properties xmlns:p="http://schemas.microsoft.com/office/2006/metadata/properties" xmlns:xsi="http://www.w3.org/2001/XMLSchema-instance" xmlns:pc="http://schemas.microsoft.com/office/infopath/2007/PartnerControls">
-  <documentManagement>
-    <_ip_UnifiedCompliancePolicyUIAction xmlns="http://schemas.microsoft.com/sharepoint/v3" xsi:nil="true"/>
-    <_ip_UnifiedCompliancePolicyProperties xmlns="http://schemas.microsoft.com/sharepoint/v3" xsi:nil="true"/>
-  </documentManagement>
-</p:properties>
+<?mso-contentType ?>
+<FormTemplates xmlns="http://schemas.microsoft.com/sharepoint/v3/contenttype/forms">
+  <Display>DocumentLibraryForm</Display>
+  <Edit>DocumentLibraryForm</Edit>
+  <New>DocumentLibraryForm</New>
+</FormTemplates>
 </file>
 
 <file path=customXml/item2.xml><?xml version="1.0" encoding="utf-8"?>
@@ -24289,27 +24725,18 @@
 </file>
 
 <file path=customXml/item3.xml><?xml version="1.0" encoding="utf-8"?>
-<?mso-contentType ?>
-<FormTemplates xmlns="http://schemas.microsoft.com/sharepoint/v3/contenttype/forms">
-  <Display>DocumentLibraryForm</Display>
-  <Edit>DocumentLibraryForm</Edit>
-  <New>DocumentLibraryForm</New>
-</FormTemplates>
+<p:properties xmlns:p="http://schemas.microsoft.com/office/2006/metadata/properties" xmlns:xsi="http://www.w3.org/2001/XMLSchema-instance" xmlns:pc="http://schemas.microsoft.com/office/infopath/2007/PartnerControls">
+  <documentManagement>
+    <_ip_UnifiedCompliancePolicyUIAction xmlns="http://schemas.microsoft.com/sharepoint/v3" xsi:nil="true"/>
+    <_ip_UnifiedCompliancePolicyProperties xmlns="http://schemas.microsoft.com/sharepoint/v3" xsi:nil="true"/>
+  </documentManagement>
+</p:properties>
 </file>
 
 <file path=customXml/itemProps1.xml><?xml version="1.0" encoding="utf-8"?>
-<ds:datastoreItem xmlns:ds="http://schemas.openxmlformats.org/officeDocument/2006/customXml" ds:itemID="{D299A1D5-F553-4264-9022-E0136C61CE27}">
+<ds:datastoreItem xmlns:ds="http://schemas.openxmlformats.org/officeDocument/2006/customXml" ds:itemID="{63C6748B-B74E-4BE1-834C-AEBB9BCA18FB}">
   <ds:schemaRefs>
-    <ds:schemaRef ds:uri="http://schemas.microsoft.com/office/infopath/2007/PartnerControls"/>
-    <ds:schemaRef ds:uri="3df75a81-b7cb-4783-ab8b-190cb7919186"/>
-    <ds:schemaRef ds:uri="http://purl.org/dc/elements/1.1/"/>
-    <ds:schemaRef ds:uri="http://schemas.microsoft.com/office/2006/documentManagement/types"/>
-    <ds:schemaRef ds:uri="http://schemas.microsoft.com/sharepoint/v3"/>
-    <ds:schemaRef ds:uri="http://schemas.openxmlformats.org/package/2006/metadata/core-properties"/>
-    <ds:schemaRef ds:uri="http://schemas.microsoft.com/office/2006/metadata/properties"/>
-    <ds:schemaRef ds:uri="http://www.w3.org/XML/1998/namespace"/>
-    <ds:schemaRef ds:uri="http://purl.org/dc/dcmitype/"/>
-    <ds:schemaRef ds:uri="http://purl.org/dc/terms/"/>
+    <ds:schemaRef ds:uri="http://schemas.microsoft.com/sharepoint/v3/contenttype/forms"/>
   </ds:schemaRefs>
 </ds:datastoreItem>
 </file>
@@ -24334,9 +24761,18 @@
 </file>
 
 <file path=customXml/itemProps3.xml><?xml version="1.0" encoding="utf-8"?>
-<ds:datastoreItem xmlns:ds="http://schemas.openxmlformats.org/officeDocument/2006/customXml" ds:itemID="{63C6748B-B74E-4BE1-834C-AEBB9BCA18FB}">
+<ds:datastoreItem xmlns:ds="http://schemas.openxmlformats.org/officeDocument/2006/customXml" ds:itemID="{D299A1D5-F553-4264-9022-E0136C61CE27}">
   <ds:schemaRefs>
-    <ds:schemaRef ds:uri="http://schemas.microsoft.com/sharepoint/v3/contenttype/forms"/>
+    <ds:schemaRef ds:uri="http://schemas.microsoft.com/office/infopath/2007/PartnerControls"/>
+    <ds:schemaRef ds:uri="3df75a81-b7cb-4783-ab8b-190cb7919186"/>
+    <ds:schemaRef ds:uri="http://purl.org/dc/elements/1.1/"/>
+    <ds:schemaRef ds:uri="http://schemas.microsoft.com/office/2006/documentManagement/types"/>
+    <ds:schemaRef ds:uri="http://schemas.microsoft.com/sharepoint/v3"/>
+    <ds:schemaRef ds:uri="http://schemas.openxmlformats.org/package/2006/metadata/core-properties"/>
+    <ds:schemaRef ds:uri="http://schemas.microsoft.com/office/2006/metadata/properties"/>
+    <ds:schemaRef ds:uri="http://www.w3.org/XML/1998/namespace"/>
+    <ds:schemaRef ds:uri="http://purl.org/dc/dcmitype/"/>
+    <ds:schemaRef ds:uri="http://purl.org/dc/terms/"/>
   </ds:schemaRefs>
 </ds:datastoreItem>
 </file>

--- a/report/Infineon_PSOC6_Lecture_Project_Status_Template.pptx
+++ b/report/Infineon_PSOC6_Lecture_Project_Status_Template.pptx
@@ -21846,7 +21846,58 @@
                   <a:schemeClr val="tx1"/>
                 </a:solidFill>
               </a:rPr>
-              <a:t>text</a:t>
+              <a:t>Finalized and successfully converted the IMU model</a:t>
+            </a:r>
+          </a:p>
+          <a:p>
+            <a:pPr marL="285750" indent="-285750" defTabSz="576000" eaLnBrk="0" hangingPunct="0">
+              <a:lnSpc>
+                <a:spcPct val="120000"/>
+              </a:lnSpc>
+              <a:buFont typeface="Arial" panose="020B0604020202020204" pitchFamily="34" charset="0"/>
+              <a:buChar char="•"/>
+            </a:pPr>
+            <a:r>
+              <a:rPr lang="en-US" dirty="0">
+                <a:solidFill>
+                  <a:schemeClr val="tx1"/>
+                </a:solidFill>
+              </a:rPr>
+              <a:t>Started work on IMU model deployment</a:t>
+            </a:r>
+          </a:p>
+          <a:p>
+            <a:pPr marL="285750" indent="-285750" defTabSz="576000" eaLnBrk="0" hangingPunct="0">
+              <a:lnSpc>
+                <a:spcPct val="120000"/>
+              </a:lnSpc>
+              <a:buFont typeface="Arial" panose="020B0604020202020204" pitchFamily="34" charset="0"/>
+              <a:buChar char="•"/>
+            </a:pPr>
+            <a:r>
+              <a:rPr lang="en-US" dirty="0">
+                <a:solidFill>
+                  <a:schemeClr val="tx1"/>
+                </a:solidFill>
+              </a:rPr>
+              <a:t>Started augmenting audio data for the microphone model</a:t>
+            </a:r>
+          </a:p>
+          <a:p>
+            <a:pPr marL="285750" indent="-285750" defTabSz="576000" eaLnBrk="0" hangingPunct="0">
+              <a:lnSpc>
+                <a:spcPct val="120000"/>
+              </a:lnSpc>
+              <a:buFont typeface="Arial" panose="020B0604020202020204" pitchFamily="34" charset="0"/>
+              <a:buChar char="•"/>
+            </a:pPr>
+            <a:r>
+              <a:rPr lang="en-US" dirty="0">
+                <a:solidFill>
+                  <a:schemeClr val="tx1"/>
+                </a:solidFill>
+              </a:rPr>
+              <a:t>Tested functionality of earlier versions of the model directly on board</a:t>
             </a:r>
           </a:p>
         </p:txBody>
@@ -21929,7 +21980,41 @@
                   <a:schemeClr val="tx1"/>
                 </a:solidFill>
               </a:rPr>
-              <a:t>Text</a:t>
+              <a:t>Finalize the audio model</a:t>
+            </a:r>
+          </a:p>
+          <a:p>
+            <a:pPr marL="285750" indent="-285750" defTabSz="576000" eaLnBrk="0" hangingPunct="0">
+              <a:lnSpc>
+                <a:spcPct val="120000"/>
+              </a:lnSpc>
+              <a:buFont typeface="Arial" panose="020B0604020202020204" pitchFamily="34" charset="0"/>
+              <a:buChar char="•"/>
+            </a:pPr>
+            <a:r>
+              <a:rPr lang="en-US" dirty="0">
+                <a:solidFill>
+                  <a:schemeClr val="tx1"/>
+                </a:solidFill>
+              </a:rPr>
+              <a:t>Deploy both models on the board</a:t>
+            </a:r>
+          </a:p>
+          <a:p>
+            <a:pPr marL="285750" indent="-285750" defTabSz="576000" eaLnBrk="0" hangingPunct="0">
+              <a:lnSpc>
+                <a:spcPct val="120000"/>
+              </a:lnSpc>
+              <a:buFont typeface="Arial" panose="020B0604020202020204" pitchFamily="34" charset="0"/>
+              <a:buChar char="•"/>
+            </a:pPr>
+            <a:r>
+              <a:rPr lang="en-US" dirty="0">
+                <a:solidFill>
+                  <a:schemeClr val="tx1"/>
+                </a:solidFill>
+              </a:rPr>
+              <a:t>Prepare an engaging presentation</a:t>
             </a:r>
           </a:p>
           <a:p>
@@ -22067,7 +22152,91 @@
                   <a:schemeClr val="tx1"/>
                 </a:solidFill>
               </a:rPr>
-              <a:t>text</a:t>
+              <a:t>Model problems</a:t>
+            </a:r>
+          </a:p>
+          <a:p>
+            <a:pPr marL="285750" indent="-285750" defTabSz="576000" eaLnBrk="0" hangingPunct="0">
+              <a:lnSpc>
+                <a:spcPct val="120000"/>
+              </a:lnSpc>
+              <a:buFont typeface="Arial" panose="020B0604020202020204" pitchFamily="34" charset="0"/>
+              <a:buChar char="•"/>
+            </a:pPr>
+            <a:r>
+              <a:rPr lang="en-US" dirty="0">
+                <a:solidFill>
+                  <a:schemeClr val="tx1"/>
+                </a:solidFill>
+              </a:rPr>
+              <a:t>Lack of training credits</a:t>
+            </a:r>
+          </a:p>
+          <a:p>
+            <a:pPr marL="285750" indent="-285750" defTabSz="576000" eaLnBrk="0" hangingPunct="0">
+              <a:lnSpc>
+                <a:spcPct val="120000"/>
+              </a:lnSpc>
+              <a:buFont typeface="Arial" panose="020B0604020202020204" pitchFamily="34" charset="0"/>
+              <a:buChar char="•"/>
+            </a:pPr>
+            <a:r>
+              <a:rPr lang="en-US" dirty="0">
+                <a:solidFill>
+                  <a:schemeClr val="tx1"/>
+                </a:solidFill>
+              </a:rPr>
+              <a:t>Email address for Lukas</a:t>
+            </a:r>
+          </a:p>
+          <a:p>
+            <a:pPr marL="285750" indent="-285750" defTabSz="576000" eaLnBrk="0" hangingPunct="0">
+              <a:lnSpc>
+                <a:spcPct val="120000"/>
+              </a:lnSpc>
+              <a:buFont typeface="Arial" panose="020B0604020202020204" pitchFamily="34" charset="0"/>
+              <a:buChar char="•"/>
+            </a:pPr>
+            <a:r>
+              <a:rPr lang="en-US" dirty="0">
+                <a:solidFill>
+                  <a:schemeClr val="tx1"/>
+                </a:solidFill>
+              </a:rPr>
+              <a:t>Question about how formal/serious the presentation needs to be</a:t>
+            </a:r>
+          </a:p>
+          <a:p>
+            <a:pPr marL="285750" indent="-285750" defTabSz="576000" eaLnBrk="0" hangingPunct="0">
+              <a:lnSpc>
+                <a:spcPct val="120000"/>
+              </a:lnSpc>
+              <a:buFont typeface="Arial" panose="020B0604020202020204" pitchFamily="34" charset="0"/>
+              <a:buChar char="•"/>
+            </a:pPr>
+            <a:r>
+              <a:rPr lang="en-US" dirty="0">
+                <a:solidFill>
+                  <a:schemeClr val="tx1"/>
+                </a:solidFill>
+              </a:rPr>
+              <a:t>Presentation form: </a:t>
+            </a:r>
+            <a:r>
+              <a:rPr lang="en-US" dirty="0" err="1">
+                <a:solidFill>
+                  <a:schemeClr val="tx1"/>
+                </a:solidFill>
+              </a:rPr>
+              <a:t>Powerpoint</a:t>
+            </a:r>
+            <a:r>
+              <a:rPr lang="en-US" dirty="0">
+                <a:solidFill>
+                  <a:schemeClr val="tx1"/>
+                </a:solidFill>
+              </a:rPr>
+              <a:t> + short demonstration sufficient?</a:t>
             </a:r>
           </a:p>
         </p:txBody>
@@ -22201,6 +22370,95 @@
               </a:rPr>
               <a:t>3. Progress report</a:t>
             </a:r>
+          </a:p>
+        </p:txBody>
+      </p:sp>
+      <p:sp>
+        <p:nvSpPr>
+          <p:cNvPr id="4" name="Rectangle: Rounded Corners 3">
+            <a:extLst>
+              <a:ext uri="{FF2B5EF4-FFF2-40B4-BE49-F238E27FC236}">
+                <a16:creationId xmlns:a16="http://schemas.microsoft.com/office/drawing/2014/main" id="{5F8120F6-1E12-2A98-AAE4-B5B358924DC4}"/>
+              </a:ext>
+            </a:extLst>
+          </p:cNvPr>
+          <p:cNvSpPr/>
+          <p:nvPr/>
+        </p:nvSpPr>
+        <p:spPr bwMode="auto">
+          <a:xfrm>
+            <a:off x="328843" y="510723"/>
+            <a:ext cx="6468485" cy="494037"/>
+          </a:xfrm>
+          <a:prstGeom prst="roundRect">
+            <a:avLst>
+              <a:gd name="adj" fmla="val 9662"/>
+            </a:avLst>
+          </a:prstGeom>
+          <a:solidFill>
+            <a:schemeClr val="tx2"/>
+          </a:solidFill>
+          <a:ln w="9525">
+            <a:noFill/>
+            <a:miter lim="800000"/>
+            <a:headEnd/>
+            <a:tailEnd/>
+          </a:ln>
+        </p:spPr>
+        <p:txBody>
+          <a:bodyPr rot="0" spcFirstLastPara="0" vertOverflow="overflow" horzOverflow="overflow" vert="horz" wrap="square" lIns="72000" tIns="72000" rIns="72000" bIns="72000" numCol="1" spcCol="0" rtlCol="0" fromWordArt="0" anchor="ctr" anchorCtr="0" forceAA="0" compatLnSpc="1">
+            <a:prstTxWarp prst="textNoShape">
+              <a:avLst/>
+            </a:prstTxWarp>
+            <a:noAutofit/>
+          </a:bodyPr>
+          <a:lstStyle/>
+          <a:p>
+            <a:pPr defTabSz="576000" eaLnBrk="0" hangingPunct="0">
+              <a:lnSpc>
+                <a:spcPct val="120000"/>
+              </a:lnSpc>
+            </a:pPr>
+            <a:r>
+              <a:rPr lang="en-US" sz="1800" b="1" dirty="0">
+                <a:solidFill>
+                  <a:schemeClr val="bg1"/>
+                </a:solidFill>
+                <a:latin typeface="+mn-lt"/>
+              </a:rPr>
+              <a:t>Team: </a:t>
+            </a:r>
+            <a:r>
+              <a:rPr lang="en-US" sz="1800" b="1" i="1" dirty="0">
+                <a:solidFill>
+                  <a:schemeClr val="bg1"/>
+                </a:solidFill>
+                <a:latin typeface="+mn-lt"/>
+              </a:rPr>
+              <a:t>Motor Group</a:t>
+            </a:r>
+          </a:p>
+          <a:p>
+            <a:pPr algn="r" defTabSz="576000" eaLnBrk="0" hangingPunct="0">
+              <a:lnSpc>
+                <a:spcPct val="120000"/>
+              </a:lnSpc>
+            </a:pPr>
+            <a:r>
+              <a:rPr lang="en-US" sz="1200" i="1" dirty="0">
+                <a:solidFill>
+                  <a:schemeClr val="bg1"/>
+                </a:solidFill>
+                <a:latin typeface="+mn-lt"/>
+              </a:rPr>
+              <a:t>Team Members: Artem Vinivitin, Mihai Marinescu, Simon Kozka</a:t>
+            </a:r>
+            <a:endParaRPr lang="en-US" sz="1600" i="1" dirty="0">
+              <a:solidFill>
+                <a:schemeClr val="bg1"/>
+              </a:solidFill>
+              <a:latin typeface="+mn-lt"/>
+            </a:endParaRPr>
           </a:p>
         </p:txBody>
       </p:sp>
@@ -22332,11 +22590,75 @@
                 <a:spcPct val="120000"/>
               </a:lnSpc>
             </a:pPr>
-            <a:endParaRPr lang="en-US" dirty="0">
-              <a:solidFill>
-                <a:schemeClr val="tx1"/>
-              </a:solidFill>
-            </a:endParaRPr>
+            <a:r>
+              <a:rPr lang="en-US" dirty="0">
+                <a:solidFill>
+                  <a:schemeClr val="tx1"/>
+                </a:solidFill>
+              </a:rPr>
+              <a:t>Details about the audio model and its development</a:t>
+            </a:r>
+          </a:p>
+          <a:p>
+            <a:pPr defTabSz="576000" eaLnBrk="0" hangingPunct="0">
+              <a:lnSpc>
+                <a:spcPct val="120000"/>
+              </a:lnSpc>
+            </a:pPr>
+            <a:r>
+              <a:rPr lang="en-US" dirty="0">
+                <a:solidFill>
+                  <a:schemeClr val="tx1"/>
+                </a:solidFill>
+              </a:rPr>
+              <a:t>Details about the IMU model and its development</a:t>
+            </a:r>
+          </a:p>
+          <a:p>
+            <a:pPr defTabSz="576000" eaLnBrk="0" hangingPunct="0">
+              <a:lnSpc>
+                <a:spcPct val="120000"/>
+              </a:lnSpc>
+            </a:pPr>
+            <a:r>
+              <a:rPr lang="en-US" dirty="0">
+                <a:solidFill>
+                  <a:schemeClr val="tx1"/>
+                </a:solidFill>
+              </a:rPr>
+              <a:t>Short overview of </a:t>
+            </a:r>
+            <a:r>
+              <a:rPr lang="en-US" dirty="0" err="1">
+                <a:solidFill>
+                  <a:schemeClr val="tx1"/>
+                </a:solidFill>
+              </a:rPr>
+              <a:t>Micropython</a:t>
+            </a:r>
+            <a:r>
+              <a:rPr lang="en-US" dirty="0">
+                <a:solidFill>
+                  <a:schemeClr val="tx1"/>
+                </a:solidFill>
+              </a:rPr>
+              <a:t> code </a:t>
+            </a:r>
+          </a:p>
+          <a:p>
+            <a:pPr defTabSz="576000" eaLnBrk="0" hangingPunct="0">
+              <a:lnSpc>
+                <a:spcPct val="120000"/>
+              </a:lnSpc>
+            </a:pPr>
+            <a:r>
+              <a:rPr lang="en-US" dirty="0">
+                <a:solidFill>
+                  <a:schemeClr val="tx1"/>
+                </a:solidFill>
+              </a:rPr>
+              <a:t>Practical use in the real world?</a:t>
+            </a:r>
           </a:p>
           <a:p>
             <a:pPr defTabSz="576000" eaLnBrk="0" hangingPunct="0">
@@ -22392,6 +22714,18 @@
                 <a:spcPct val="120000"/>
               </a:lnSpc>
             </a:pPr>
+            <a:endParaRPr lang="en-US" dirty="0">
+              <a:solidFill>
+                <a:schemeClr val="tx1"/>
+              </a:solidFill>
+            </a:endParaRPr>
+          </a:p>
+          <a:p>
+            <a:pPr defTabSz="576000" eaLnBrk="0" hangingPunct="0">
+              <a:lnSpc>
+                <a:spcPct val="120000"/>
+              </a:lnSpc>
+            </a:pPr>
             <a:r>
               <a:rPr lang="en-US" dirty="0">
                 <a:solidFill>
@@ -22399,6 +22733,21 @@
                 </a:solidFill>
               </a:rPr>
               <a:t>Any special equipment need for demo at the demo Day ?</a:t>
+            </a:r>
+          </a:p>
+          <a:p>
+            <a:pPr defTabSz="576000" eaLnBrk="0" hangingPunct="0">
+              <a:lnSpc>
+                <a:spcPct val="120000"/>
+              </a:lnSpc>
+            </a:pPr>
+            <a:r>
+              <a:rPr lang="en-US" dirty="0">
+                <a:solidFill>
+                  <a:schemeClr val="tx1"/>
+                </a:solidFill>
+              </a:rPr>
+              <a:t>We have prepared everything and all we need is your attention :)</a:t>
             </a:r>
           </a:p>
         </p:txBody>
@@ -24529,12 +24878,12 @@
 </file>
 
 <file path=customXml/item1.xml><?xml version="1.0" encoding="utf-8"?>
-<?mso-contentType ?>
-<FormTemplates xmlns="http://schemas.microsoft.com/sharepoint/v3/contenttype/forms">
-  <Display>DocumentLibraryForm</Display>
-  <Edit>DocumentLibraryForm</Edit>
-  <New>DocumentLibraryForm</New>
-</FormTemplates>
+<p:properties xmlns:p="http://schemas.microsoft.com/office/2006/metadata/properties" xmlns:xsi="http://www.w3.org/2001/XMLSchema-instance" xmlns:pc="http://schemas.microsoft.com/office/infopath/2007/PartnerControls">
+  <documentManagement>
+    <_ip_UnifiedCompliancePolicyUIAction xmlns="http://schemas.microsoft.com/sharepoint/v3" xsi:nil="true"/>
+    <_ip_UnifiedCompliancePolicyProperties xmlns="http://schemas.microsoft.com/sharepoint/v3" xsi:nil="true"/>
+  </documentManagement>
+</p:properties>
 </file>
 
 <file path=customXml/item2.xml><?xml version="1.0" encoding="utf-8"?>
@@ -24725,18 +25074,27 @@
 </file>
 
 <file path=customXml/item3.xml><?xml version="1.0" encoding="utf-8"?>
-<p:properties xmlns:p="http://schemas.microsoft.com/office/2006/metadata/properties" xmlns:xsi="http://www.w3.org/2001/XMLSchema-instance" xmlns:pc="http://schemas.microsoft.com/office/infopath/2007/PartnerControls">
-  <documentManagement>
-    <_ip_UnifiedCompliancePolicyUIAction xmlns="http://schemas.microsoft.com/sharepoint/v3" xsi:nil="true"/>
-    <_ip_UnifiedCompliancePolicyProperties xmlns="http://schemas.microsoft.com/sharepoint/v3" xsi:nil="true"/>
-  </documentManagement>
-</p:properties>
+<?mso-contentType ?>
+<FormTemplates xmlns="http://schemas.microsoft.com/sharepoint/v3/contenttype/forms">
+  <Display>DocumentLibraryForm</Display>
+  <Edit>DocumentLibraryForm</Edit>
+  <New>DocumentLibraryForm</New>
+</FormTemplates>
 </file>
 
 <file path=customXml/itemProps1.xml><?xml version="1.0" encoding="utf-8"?>
-<ds:datastoreItem xmlns:ds="http://schemas.openxmlformats.org/officeDocument/2006/customXml" ds:itemID="{63C6748B-B74E-4BE1-834C-AEBB9BCA18FB}">
+<ds:datastoreItem xmlns:ds="http://schemas.openxmlformats.org/officeDocument/2006/customXml" ds:itemID="{D299A1D5-F553-4264-9022-E0136C61CE27}">
   <ds:schemaRefs>
-    <ds:schemaRef ds:uri="http://schemas.microsoft.com/sharepoint/v3/contenttype/forms"/>
+    <ds:schemaRef ds:uri="http://schemas.microsoft.com/office/infopath/2007/PartnerControls"/>
+    <ds:schemaRef ds:uri="3df75a81-b7cb-4783-ab8b-190cb7919186"/>
+    <ds:schemaRef ds:uri="http://purl.org/dc/elements/1.1/"/>
+    <ds:schemaRef ds:uri="http://schemas.microsoft.com/office/2006/documentManagement/types"/>
+    <ds:schemaRef ds:uri="http://schemas.microsoft.com/sharepoint/v3"/>
+    <ds:schemaRef ds:uri="http://schemas.openxmlformats.org/package/2006/metadata/core-properties"/>
+    <ds:schemaRef ds:uri="http://schemas.microsoft.com/office/2006/metadata/properties"/>
+    <ds:schemaRef ds:uri="http://www.w3.org/XML/1998/namespace"/>
+    <ds:schemaRef ds:uri="http://purl.org/dc/dcmitype/"/>
+    <ds:schemaRef ds:uri="http://purl.org/dc/terms/"/>
   </ds:schemaRefs>
 </ds:datastoreItem>
 </file>
@@ -24761,18 +25119,9 @@
 </file>
 
 <file path=customXml/itemProps3.xml><?xml version="1.0" encoding="utf-8"?>
-<ds:datastoreItem xmlns:ds="http://schemas.openxmlformats.org/officeDocument/2006/customXml" ds:itemID="{D299A1D5-F553-4264-9022-E0136C61CE27}">
+<ds:datastoreItem xmlns:ds="http://schemas.openxmlformats.org/officeDocument/2006/customXml" ds:itemID="{63C6748B-B74E-4BE1-834C-AEBB9BCA18FB}">
   <ds:schemaRefs>
-    <ds:schemaRef ds:uri="http://schemas.microsoft.com/office/infopath/2007/PartnerControls"/>
-    <ds:schemaRef ds:uri="3df75a81-b7cb-4783-ab8b-190cb7919186"/>
-    <ds:schemaRef ds:uri="http://purl.org/dc/elements/1.1/"/>
-    <ds:schemaRef ds:uri="http://schemas.microsoft.com/office/2006/documentManagement/types"/>
-    <ds:schemaRef ds:uri="http://schemas.microsoft.com/sharepoint/v3"/>
-    <ds:schemaRef ds:uri="http://schemas.openxmlformats.org/package/2006/metadata/core-properties"/>
-    <ds:schemaRef ds:uri="http://schemas.microsoft.com/office/2006/metadata/properties"/>
-    <ds:schemaRef ds:uri="http://www.w3.org/XML/1998/namespace"/>
-    <ds:schemaRef ds:uri="http://purl.org/dc/dcmitype/"/>
-    <ds:schemaRef ds:uri="http://purl.org/dc/terms/"/>
+    <ds:schemaRef ds:uri="http://schemas.microsoft.com/sharepoint/v3/contenttype/forms"/>
   </ds:schemaRefs>
 </ds:datastoreItem>
 </file>
